--- a/slides/study-overview/study-overview.pptx
+++ b/slides/study-overview/study-overview.pptx
@@ -596,7 +596,7 @@
           <a:lstStyle/>
           <a:p>
             <a:r>
-              <a:t>guidance는 사후분포 p0 ∝ q0 · exp(−E)에서 샘플하려는 것이다. 정확한 기울기는 x_t에서 E를 재야 하지만 알 수 없으므로, 한 스텝 denoise한 x̂0에서 E를 재고 연쇄 법칙으로 x_t까지 기울기를 보낸다(DPS). CFG의 w가 크면 조건을 더 강하게 따르지만 다양성이 준다. travplan 문서 §B.8.2의 GRACE는 이 역방향 한 스텝을 MPPI 가중평균으로 추정한다.</a:t>
+              <a:t>guidance는 사후분포 p0 ∝ q0 · exp(−E)에서 샘플링하려는 것이다. 정확한 기울기는 x_t에서 E를 재야 하지만 알 수 없으므로, 한 스텝 denoise한 x̂0에서 E를 재고 연쇄 법칙으로 x_t까지 기울기를 보낸다(DPS). CFG의 w가 크면 조건을 더 강하게 따르지만 다양성이 준다. travplan 문서 §B.8.2의 GRACE는 이 역방향 한 스텝을 MPPI 가중평균으로 추정한다.</a:t>
             </a:r>
           </a:p>
         </p:txBody>
@@ -736,7 +736,7 @@
           <a:lstStyle/>
           <a:p>
             <a:r>
-              <a:t>Planner D는 flow matching 정책이다. 파라미터는 약 149만 개. 같은 속도망을 diffusion(선형 일정 DDPM 조상 샘플링)으로도 샘플할 수 있고, 두 샘플러 모두 4 지형 × 3 seed에서 12/12다. 데이터가 궤적 좌표가 아니라 제어 변화율이라는 점이 핵심이다: 생성된 열을 적분해 제어를 만들고 스워브 모델로 굴리므로, 어떤 샘플이든 동역학적으로 실현 가능하다. guidance의 J는 TravMap cost의 시간 적분, 0.5를 넘는 cost에 대한 이차 벌점, 남은 거리다.</a:t>
+              <a:t>Planner D는 flow matching 정책이다. 파라미터는 약 149만 개. 같은 속도 네트워크를 diffusion(선형 일정 DDPM 조상 샘플링)으로도 샘플할 수 있고, 두 샘플러 모두 4 지형 × 3 seed에서 12/12다. 데이터가 궤적 좌표가 아니라 제어 변화율이라는 점이 핵심이다: 생성된 변화율 열을 적분해 제어를 만들고 스워브 모델로 rollout하므로, 어떤 샘플이든 동역학적으로 실현 가능하다. guidance의 J는 TravMap cost의 시간 적분, 0.5를 넘는 cost에 대한 이차 페널티, 남은 거리다.</a:t>
             </a:r>
           </a:p>
         </p:txBody>
@@ -876,7 +876,7 @@
           <a:lstStyle/>
           <a:p>
             <a:r>
-              <a:t>한 주기는 다섯 단계다: 지난 해를 한 칸 당겨 warm start, 노이즈를 더해 K개 후보, 후보마다 굴려 비용 S_k, 지수 가중치, 가중평균의 첫 제어만 실행. 최솟값 ρ를 빼지 않으면 모든 후보가 치명 벌점(1000)을 받을 때 0/0이 된다. 함정: λ는 비용 절대 크기에 묶여 있고, 후보가 모두 나쁜 곳에 있으면 평균도 나쁘며, 두 무리 사이로 평균이 떨어질 수 있다. 유효 샘플 수 1/Σw²는 λ = 0.5에서 1.27, λ = 2에서 2.38이다. 코드: control/mppi/mppi.py, smooth.py.</a:t>
+              <a:t>한 주기는 다섯 단계다: 지난 해를 한 스텝 당겨 warm start, 노이즈를 더해 K개 후보, 후보마다 rollout해 비용 S_k, 지수 가중치, 가중평균의 첫 제어만 실행. 최솟값 ρ를 빼지 않으면 모든 후보가 치명 페널티(1000)를 받을 때 0/0이 된다. 함정: λ는 비용의 절대 크기에 따라 달라지고, 후보가 모두 나쁜 곳에 있으면 평균도 나쁘며, 두 무리 사이로 평균이 떨어질 수 있다. 유효 샘플 수 1/Σw²는 λ = 0.5에서 1.27, λ = 2에서 2.38이다. 코드: control/mppi/mppi.py, smooth.py.</a:t>
             </a:r>
           </a:p>
         </p:txBody>
@@ -946,7 +946,7 @@
           <a:lstStyle/>
           <a:p>
             <a:r>
-              <a:t>원 논문의 가중치에는 제어 비용 항 λ Σ uᵀ Σ⁻¹ ε가 들어간다. travplan은 이 항을 빼서 기준 분포를 현재 제어열 주변에 둔 것과 같다. 또 경로 추종 후보 30%를 섞으면서 중요도 가중치를 그 제안 분포에 맞게 고치지 않는다. 같은 볼츠만 가중치를 섞기에 쓰면 MPPI, 고르기에 쓰면 정책 전환이 된다(§A.8).</a:t>
+              <a:t>원 논문의 가중치에는 제어 비용 항 λ Σ uᵀ Σ⁻¹ ε가 들어간다. travplan은 이 항을 빼서 기준 분포를 현재 제어열 주변에 둔 것과 같다. 또 경로 추종 후보 30%를 섞으면서 중요도 가중치를 그 제안 분포에 맞게 고치지 않는다. 같은 볼츠만 가중치를 평균에 쓰면 MPPI, 선택에 쓰면 정책 전환이 된다(§A.8).</a:t>
             </a:r>
           </a:p>
         </p:txBody>
@@ -1156,7 +1156,7 @@
           <a:lstStyle/>
           <a:p>
             <a:r>
-              <a:t>CVaR는 분포를 안다고 가정하고 그 안의 꼬리를 재는 척도다. 분포 추정 자체가 틀렸을 때를 다루는 Wasserstein 공(분포적 강건)과는 다르다(§0.2b). 가우시안이면 VaR = μ + σΦ⁻¹(1−α), CVaR = μ + σ φ(Φ⁻¹(1−α))/α로 닫힌 식이다. RiskCost에는 동적 장애물 겹침에 대한 큰 벌점 P도 더해진다. 인식 문서 A.7, Planner B.9, Controller C.2(RA-MPPI, DRA-MPPI)가 같은 척도를 쓴다.</a:t>
+              <a:t>CVaR는 분포를 안다고 가정하고 그 안의 꼬리를 재는 척도다. 분포 추정 자체가 틀렸을 때를 다루는 Wasserstein ball(분포 강건 최적화)과는 다르다(§0.2b). 가우시안이면 VaR = μ + σΦ⁻¹(1−α), CVaR = μ + σ φ(Φ⁻¹(1−α))/α로 닫힌 식이다. RiskCost에는 동적 장애물 겹침에 대한 큰 페널티 P도 더해진다. 인식 문서 A.7, Planner B.9, Controller C.2(RA-MPPI, DRA-MPPI)가 같은 척도를 쓴다.</a:t>
             </a:r>
           </a:p>
         </p:txBody>
@@ -1226,7 +1226,7 @@
           <a:lstStyle/>
           <a:p>
             <a:r>
-              <a:t>travplan 스워브를 몸체 좌표에서 속도 명령 u = (vx, vy)로 움직이는 점으로 보면 g는 단위 행렬이고, 제약은 속도 공간의 반공간 하나다. 이미 허용 영역 안이면 u_nom을 그대로 둔다(max(0, ·)). 이산 시간 MPC에서는 h_(k+1) ≥ (1−γ) h_k 꼴로 쓰고, γ가 작을수록 일찍 넓게 돈다(Zeng et al., ACC 2021). 함정: h가 상대 차수 1이어야 하고, 여러 제약이 충돌하면 QP가 불능이 된다.</a:t>
+              <a:t>travplan 스워브를 몸체 좌표에서 속도 명령 u = (vx, vy)로 움직이는 점으로 보면 g는 단위 행렬이고, 제약은 속도 공간의 반공간 하나다. 이미 허용 영역 안이면 u_nom을 그대로 둔다(max(0, ·)). 이산 시간 MPC에서는 h_(k+1) ≥ (1−γ) h_k 꼴로 쓰고, γ가 작을수록 일찍 넓게 돈다(Zeng et al., ACC 2021). 함정: h가 상대 차수 1이어야 하고, 여러 제약이 충돌하면 QP가 infeasible이 된다.</a:t>
             </a:r>
           </a:p>
         </p:txBody>
@@ -1366,7 +1366,7 @@
           <a:lstStyle/>
           <a:p>
             <a:r>
-              <a:t>CVaR는 볼록이라 h가 아핀이고 표본이 유한하면 제약을 선형 계획/QP로 풀 수 있다. Adaptive CVaR-BF는 CasADi 구현이 공개돼 있어 travplan의 acados 트랙과도 맞는다. 위험 중립 barrier는 기대값 E[h] ≥ (1−γ)h만 지키므로 실제 표본의 일부는 h &lt; 0으로 떨어진다. 그것이 그림 (b)다.</a:t>
+              <a:t>CVaR는 볼록이라 h가 아핀이고 샘플이 유한하면 제약을 선형 계획/QP로 풀 수 있다. Adaptive CVaR-BF는 CasADi 구현이 공개돼 있어 travplan의 acados 트랙과도 맞는다. 위험 중립 barrier는 기대값 E[h] ≥ (1−γ)h만 지키므로 실제 샘플의 일부는 h &lt; 0으로 떨어진다. 그것이 그림 (b)다.</a:t>
             </a:r>
           </a:p>
         </p:txBody>
@@ -1436,7 +1436,7 @@
           <a:lstStyle/>
           <a:p>
             <a:r>
-              <a:t>함정: 보장은 보정 집합 전체에 대한 평균 포함률이다. 한 번 뽑은 보정 집합으로 정한 반경의 실제 포함률은 Beta(n+1−l, l) 분포를 따르고, n = 9면 표준편차가 0.12나 된다. 분포가 바뀌면(배포 환경에 보행자가 다르게 움직이면) 교환 가능성이 깨진다. 그때는 적응형 conformal(ACI)이 온라인으로 α를 고친다. 이 반경은 CBF나 MPC 거리 제약의 여유로 바로 쓸 수 있다.</a:t>
+              <a:t>함정: 보장은 보정 집합 전체에 대한 평균 포함률(coverage)이다. 한 번 뽑은 보정 집합으로 정한 반경의 실제 포함률은 Beta(n+1−l, l) 분포를 따르고, n = 9면 표준편차가 0.12나 된다. 분포가 바뀌면(배포 환경에 보행자가 다르게 움직이면) 교환 가능성이 깨진다. 그때는 적응형 conformal(ACI)이 온라인으로 α를 고친다. 이 반경은 CBF나 MPC 거리 제약의 여유로 바로 쓸 수 있다.</a:t>
             </a:r>
           </a:p>
         </p:txBody>
@@ -1786,7 +1786,7 @@
           <a:lstStyle/>
           <a:p>
             <a:r>
-              <a:t>travplan이 costmap을 버린 게 아니라 공통 표현만 바꾼 것이다. Nav2의 행동 트리, 복구 행동, 전역 플래너는 그대로 쓴다. 핵심은 음의 장애물: 포트홀은 반사가 돌아오지 않아 costmap에서 미관측이 되고, 미관측은 보통 자유공간처럼 지나간다. TP-0031, 0044, 0047, 0067이 전부 이 한 칸을 메우는 작업이었다. SIGMA 채널이 불확실성을 담는 자리다.</a:t>
+              <a:t>travplan이 costmap을 버린 게 아니라 공통 표현만 바꾼 것이다. Nav2의 행동 트리, 복구 행동, 전역 플래너는 그대로 쓴다. 핵심은 음의 장애물: 포트홀은 반사가 돌아오지 않아 costmap에서 미관측이 되고, 미관측은 보통 자유공간처럼 지나간다. TP-0031, 0044, 0047, 0067이 전부 이 빈틈 하나를 메우는 작업이었다. SIGMA 채널이 불확실성을 담는 자리다.</a:t>
             </a:r>
           </a:p>
         </p:txBody>
@@ -1856,7 +1856,7 @@
           <a:lstStyle/>
           <a:p>
             <a:r>
-              <a:t>인식 문서(§A)는 8,000줄이 넘는다. 여기서는 TravMap의 ELEV, COST, SIGMA 세 채널을 만드는 식만 본다.</a:t>
+              <a:t>인식 문서(§A)는 8,000줄이 넘는다. 여기서는 TravMap의 ELEV, COST, SIGMA 세 채널을 만드는 식만 다룬다.</a:t>
             </a:r>
           </a:p>
         </p:txBody>
@@ -1926,7 +1926,7 @@
           <a:lstStyle/>
           <a:p>
             <a:r>
-              <a:t>분산이 작은 쪽을 더 믿는 정밀도 가중 평균이다. 측정 분산이 거리 제곱에 비례하므로 먼 점은 적게 반영된다. 이상치는 Mahalanobis 거리로 버린다. 상한 층이 핵심: 광선이 관측되지 않은 칸 위를 지나가면 그 칸의 지면은 광선 높이보다 낮다. travplan L1(--perception l1)은 이 코드의 코어를 쓰고, TP-0146에서 매퍼 칸이 반 칸 어긋난 래퍼 버그를 고쳤다.</a:t>
+              <a:t>분산이 작은 쪽을 더 믿는 정밀도 가중 평균이다. 측정 분산이 거리 제곱에 비례하므로 먼 점은 적게 반영된다. 이상치는 Mahalanobis 거리로 버린다. 상한 층이 핵심: 광선이 관측되지 않은 셀 위를 지나가면 그 셀의 지면은 광선 높이보다 낮다. travplan L1(--perception l1)은 이 코드의 코어를 쓰고, TP-0146에서 매퍼 격자가 반 셀 어긋난 래퍼 버그를 고쳤다.</a:t>
             </a:r>
           </a:p>
         </p:txBody>
@@ -1996,7 +1996,7 @@
           <a:lstStyle/>
           <a:p>
             <a:r>
-              <a:t>기본 한계는 경사 0.26 rad(약 15도), 턱 0.08 m, 거칠기 0.04 m이고, 한계의 30% 아래는 비용 0이다. 미관측 칸은 비용 0.5, sigma 1이다. 최댓값 규칙은 해석 가능하고 안전 쪽이지만, 0.07 m 턱을 막는 오탐의 뿌리이기도 하다(TP-0048, TP-0067). TravNet은 aleatoric 불확실성을 log 분산으로 배운다. 손실의 첫 항은 오차를 분산으로 나눈 것, 둘째 항은 분산을 무한히 키우지 못하게 막는 벌점이다.</a:t>
+              <a:t>기본 한계는 경사 0.26 rad(약 15도), 턱 0.08 m, 거칠기 0.04 m이고, 한계의 30% 아래는 비용 0이다. 미관측 셀은 비용 0.5, sigma 1이다. 최댓값 규칙은 해석이 쉽고 보수적이지만, 0.07 m 턱을 막는 오탐의 뿌리이기도 하다(TP-0048, TP-0067). TravNet은 aleatoric 불확실성을 log 분산으로 배운다. 손실의 첫 항은 오차를 분산으로 나눈 것, 둘째 항은 분산을 무한히 키우지 못하게 막는 페널티다.</a:t>
             </a:r>
           </a:p>
         </p:txBody>
@@ -5214,7 +5214,7 @@
       <p:grpSpPr/>
       <p:pic>
         <p:nvPicPr>
-          <p:cNvPr id="2" name="Picture 1" descr="01.jpg"/>
+          <p:cNvPr id="2" name="Picture 1" descr="001.jpg"/>
           <p:cNvPicPr>
             <a:picLocks noChangeAspect="1"/>
           </p:cNvPicPr>
@@ -5256,7 +5256,7 @@
       <p:grpSpPr/>
       <p:pic>
         <p:nvPicPr>
-          <p:cNvPr id="2" name="Picture 1" descr="10.jpg"/>
+          <p:cNvPr id="2" name="Picture 1" descr="010.jpg"/>
           <p:cNvPicPr>
             <a:picLocks noChangeAspect="1"/>
           </p:cNvPicPr>
@@ -5298,7 +5298,7 @@
       <p:grpSpPr/>
       <p:pic>
         <p:nvPicPr>
-          <p:cNvPr id="2" name="Picture 1" descr="11.jpg"/>
+          <p:cNvPr id="2" name="Picture 1" descr="011.jpg"/>
           <p:cNvPicPr>
             <a:picLocks noChangeAspect="1"/>
           </p:cNvPicPr>
@@ -5340,7 +5340,7 @@
       <p:grpSpPr/>
       <p:pic>
         <p:nvPicPr>
-          <p:cNvPr id="2" name="Picture 1" descr="12.jpg"/>
+          <p:cNvPr id="2" name="Picture 1" descr="012.jpg"/>
           <p:cNvPicPr>
             <a:picLocks noChangeAspect="1"/>
           </p:cNvPicPr>
@@ -5382,7 +5382,7 @@
       <p:grpSpPr/>
       <p:pic>
         <p:nvPicPr>
-          <p:cNvPr id="2" name="Picture 1" descr="13.jpg"/>
+          <p:cNvPr id="2" name="Picture 1" descr="013.jpg"/>
           <p:cNvPicPr>
             <a:picLocks noChangeAspect="1"/>
           </p:cNvPicPr>
@@ -5424,7 +5424,7 @@
       <p:grpSpPr/>
       <p:pic>
         <p:nvPicPr>
-          <p:cNvPr id="2" name="Picture 1" descr="14.jpg"/>
+          <p:cNvPr id="2" name="Picture 1" descr="014.jpg"/>
           <p:cNvPicPr>
             <a:picLocks noChangeAspect="1"/>
           </p:cNvPicPr>
@@ -5466,7 +5466,7 @@
       <p:grpSpPr/>
       <p:pic>
         <p:nvPicPr>
-          <p:cNvPr id="2" name="Picture 1" descr="15.jpg"/>
+          <p:cNvPr id="2" name="Picture 1" descr="015.jpg"/>
           <p:cNvPicPr>
             <a:picLocks noChangeAspect="1"/>
           </p:cNvPicPr>
@@ -5508,7 +5508,7 @@
       <p:grpSpPr/>
       <p:pic>
         <p:nvPicPr>
-          <p:cNvPr id="2" name="Picture 1" descr="16.jpg"/>
+          <p:cNvPr id="2" name="Picture 1" descr="016.jpg"/>
           <p:cNvPicPr>
             <a:picLocks noChangeAspect="1"/>
           </p:cNvPicPr>
@@ -5550,7 +5550,7 @@
       <p:grpSpPr/>
       <p:pic>
         <p:nvPicPr>
-          <p:cNvPr id="2" name="Picture 1" descr="17.jpg"/>
+          <p:cNvPr id="2" name="Picture 1" descr="017.jpg"/>
           <p:cNvPicPr>
             <a:picLocks noChangeAspect="1"/>
           </p:cNvPicPr>
@@ -5592,7 +5592,7 @@
       <p:grpSpPr/>
       <p:pic>
         <p:nvPicPr>
-          <p:cNvPr id="2" name="Picture 1" descr="18.jpg"/>
+          <p:cNvPr id="2" name="Picture 1" descr="018.jpg"/>
           <p:cNvPicPr>
             <a:picLocks noChangeAspect="1"/>
           </p:cNvPicPr>
@@ -5634,7 +5634,7 @@
       <p:grpSpPr/>
       <p:pic>
         <p:nvPicPr>
-          <p:cNvPr id="2" name="Picture 1" descr="19.jpg"/>
+          <p:cNvPr id="2" name="Picture 1" descr="019.jpg"/>
           <p:cNvPicPr>
             <a:picLocks noChangeAspect="1"/>
           </p:cNvPicPr>
@@ -5676,7 +5676,7 @@
       <p:grpSpPr/>
       <p:pic>
         <p:nvPicPr>
-          <p:cNvPr id="2" name="Picture 1" descr="02.jpg"/>
+          <p:cNvPr id="2" name="Picture 1" descr="002.jpg"/>
           <p:cNvPicPr>
             <a:picLocks noChangeAspect="1"/>
           </p:cNvPicPr>
@@ -5718,7 +5718,7 @@
       <p:grpSpPr/>
       <p:pic>
         <p:nvPicPr>
-          <p:cNvPr id="2" name="Picture 1" descr="20.jpg"/>
+          <p:cNvPr id="2" name="Picture 1" descr="020.jpg"/>
           <p:cNvPicPr>
             <a:picLocks noChangeAspect="1"/>
           </p:cNvPicPr>
@@ -5760,7 +5760,7 @@
       <p:grpSpPr/>
       <p:pic>
         <p:nvPicPr>
-          <p:cNvPr id="2" name="Picture 1" descr="21.jpg"/>
+          <p:cNvPr id="2" name="Picture 1" descr="021.jpg"/>
           <p:cNvPicPr>
             <a:picLocks noChangeAspect="1"/>
           </p:cNvPicPr>
@@ -5802,7 +5802,7 @@
       <p:grpSpPr/>
       <p:pic>
         <p:nvPicPr>
-          <p:cNvPr id="2" name="Picture 1" descr="22.jpg"/>
+          <p:cNvPr id="2" name="Picture 1" descr="022.jpg"/>
           <p:cNvPicPr>
             <a:picLocks noChangeAspect="1"/>
           </p:cNvPicPr>
@@ -5844,7 +5844,7 @@
       <p:grpSpPr/>
       <p:pic>
         <p:nvPicPr>
-          <p:cNvPr id="2" name="Picture 1" descr="23.jpg"/>
+          <p:cNvPr id="2" name="Picture 1" descr="023.jpg"/>
           <p:cNvPicPr>
             <a:picLocks noChangeAspect="1"/>
           </p:cNvPicPr>
@@ -5886,7 +5886,7 @@
       <p:grpSpPr/>
       <p:pic>
         <p:nvPicPr>
-          <p:cNvPr id="2" name="Picture 1" descr="24.jpg"/>
+          <p:cNvPr id="2" name="Picture 1" descr="024.jpg"/>
           <p:cNvPicPr>
             <a:picLocks noChangeAspect="1"/>
           </p:cNvPicPr>
@@ -5928,7 +5928,7 @@
       <p:grpSpPr/>
       <p:pic>
         <p:nvPicPr>
-          <p:cNvPr id="2" name="Picture 1" descr="25.jpg"/>
+          <p:cNvPr id="2" name="Picture 1" descr="025.jpg"/>
           <p:cNvPicPr>
             <a:picLocks noChangeAspect="1"/>
           </p:cNvPicPr>
@@ -5970,7 +5970,7 @@
       <p:grpSpPr/>
       <p:pic>
         <p:nvPicPr>
-          <p:cNvPr id="2" name="Picture 1" descr="03.jpg"/>
+          <p:cNvPr id="2" name="Picture 1" descr="003.jpg"/>
           <p:cNvPicPr>
             <a:picLocks noChangeAspect="1"/>
           </p:cNvPicPr>
@@ -6012,7 +6012,7 @@
       <p:grpSpPr/>
       <p:pic>
         <p:nvPicPr>
-          <p:cNvPr id="2" name="Picture 1" descr="04.jpg"/>
+          <p:cNvPr id="2" name="Picture 1" descr="004.jpg"/>
           <p:cNvPicPr>
             <a:picLocks noChangeAspect="1"/>
           </p:cNvPicPr>
@@ -6054,7 +6054,7 @@
       <p:grpSpPr/>
       <p:pic>
         <p:nvPicPr>
-          <p:cNvPr id="2" name="Picture 1" descr="05.jpg"/>
+          <p:cNvPr id="2" name="Picture 1" descr="005.jpg"/>
           <p:cNvPicPr>
             <a:picLocks noChangeAspect="1"/>
           </p:cNvPicPr>
@@ -6096,7 +6096,7 @@
       <p:grpSpPr/>
       <p:pic>
         <p:nvPicPr>
-          <p:cNvPr id="2" name="Picture 1" descr="06.jpg"/>
+          <p:cNvPr id="2" name="Picture 1" descr="006.jpg"/>
           <p:cNvPicPr>
             <a:picLocks noChangeAspect="1"/>
           </p:cNvPicPr>
@@ -6138,7 +6138,7 @@
       <p:grpSpPr/>
       <p:pic>
         <p:nvPicPr>
-          <p:cNvPr id="2" name="Picture 1" descr="07.jpg"/>
+          <p:cNvPr id="2" name="Picture 1" descr="007.jpg"/>
           <p:cNvPicPr>
             <a:picLocks noChangeAspect="1"/>
           </p:cNvPicPr>
@@ -6180,7 +6180,7 @@
       <p:grpSpPr/>
       <p:pic>
         <p:nvPicPr>
-          <p:cNvPr id="2" name="Picture 1" descr="08.jpg"/>
+          <p:cNvPr id="2" name="Picture 1" descr="008.jpg"/>
           <p:cNvPicPr>
             <a:picLocks noChangeAspect="1"/>
           </p:cNvPicPr>
@@ -6222,7 +6222,7 @@
       <p:grpSpPr/>
       <p:pic>
         <p:nvPicPr>
-          <p:cNvPr id="2" name="Picture 1" descr="09.jpg"/>
+          <p:cNvPr id="2" name="Picture 1" descr="009.jpg"/>
           <p:cNvPicPr>
             <a:picLocks noChangeAspect="1"/>
           </p:cNvPicPr>

--- a/slides/study-overview/study-overview.pptx
+++ b/slides/study-overview/study-overview.pptx
@@ -876,7 +876,7 @@
           <a:lstStyle/>
           <a:p>
             <a:r>
-              <a:t>한 주기는 다섯 단계다: 지난 해를 한 스텝 당겨 warm start, 노이즈를 더해 K개 후보, 후보마다 rollout해 비용 S_k, 지수 가중치, 가중평균의 첫 제어만 실행. 최솟값 ρ를 빼지 않으면 모든 후보가 치명 페널티(1000)를 받을 때 0/0이 된다. 함정: λ는 비용의 절대 크기에 따라 달라지고, 후보가 모두 나쁜 곳에 있으면 평균도 나쁘며, 두 무리 사이로 평균이 떨어질 수 있다. 유효 샘플 수 1/Σw²는 λ = 0.5에서 1.27, λ = 2에서 2.38이다. 코드: control/mppi/mppi.py, smooth.py.</a:t>
+              <a:t>한 주기는 다섯 단계다: 지난 해를 한 스텝 당겨 warm start, 노이즈를 더해 K개 후보, 후보마다 rollout해 비용 S_k, 지수 가중치, 가중평균의 첫 제어만 실행. 최솟값 ρ를 빼지 않으면 모든 후보가 치명 페널티(1000)를 받을 때 0/0이 된다. 함정: λ는 비용의 절대 크기에 따라 달라지고, 후보가 모두 나쁜 곳에 있으면 평균도 나쁘며, 두 무리 사이로 평균이 떨어질 수 있다. 유효 샘플 수 1/Σw²는 λ = 0.5에서 1.27, λ = 2에서 2.38이다. MPPIConfig 기본값은 후보 K 768, horizon T × dt 40 × 0.1 s, 온도 λ 0.5, 경로 추종 후보 30 %다. 코드: control/mppi/mppi.py, smooth.py. 영상에서는 정보이론적 MPPI가 AutoRally를 흙길 트랙에서 공격적으로 모는 것을 본다([14]의 학회판, Williams 외 ICRA 2017의 영상이다).</a:t>
             </a:r>
           </a:p>
         </p:txBody>
@@ -1016,7 +1016,7 @@
           <a:lstStyle/>
           <a:p>
             <a:r>
-              <a:t>NMPC는 기울기로 풀기 때문에 계단 모양 비용(치명 셀)에서 방향을 얻지 못한다. 대신 hard 제약, 튜브, 확률 제약을 품는다. 표의 수치는 travplan 권장 L1 + 스워브 plant 조건, 레벨 3 seed 10 × 오프셋 3 × 지형 4(TP-0150, TP-0152)다. 지금은 MPPI 갈래가 앞서지만, 혼돈 조건이라 짝 비교와 잡음 바닥으로 판정해야 한다(CLAUDE.md 2층 게이트). 코드: control/acados_mpc/.</a:t>
+              <a:t>NMPC는 기울기로 풀기 때문에 계단 모양 비용(치명 셀)에서 방향을 얻지 못한다. 대신 hard 제약, 튜브, 확률 제약을 품는다. plant L1 레벨 3 도달(치명)은 mppi_plant_lag 239/360 (4), mpc 222/360 (34), mpc_gp 215/360 (32)이다. 조건은 travplan 권장 L1 + 스워브 plant, 레벨 3 seed 10 × 오프셋 3 × 지형 4(TP-0150, TP-0152)다. 지금은 MPPI 갈래가 앞서지만, 혼돈 조건이라 짝 비교와 잡음 바닥으로 판정해야 한다(CLAUDE.md 2층 게이트). 코드: control/acados_mpc/. 영상에서는 처음엔 모델 오차로 충돌하던 RC 경주차가 GP로 잔차를 배운 뒤 더 빠르고 안전하게 도는 것을 본다.</a:t>
             </a:r>
           </a:p>
         </p:txBody>
@@ -1366,7 +1366,7 @@
           <a:lstStyle/>
           <a:p>
             <a:r>
-              <a:t>CVaR는 볼록이라 h가 아핀이고 샘플이 유한하면 제약을 선형 계획/QP로 풀 수 있다. Adaptive CVaR-BF는 CasADi 구현이 공개돼 있어 travplan의 acados 트랙과도 맞는다. 위험 중립 barrier는 기대값 E[h] ≥ (1−γ)h만 지키므로 실제 샘플의 일부는 h &lt; 0으로 떨어진다. 그것이 그림 (b)다.</a:t>
+              <a:t>CVaR는 볼록이라 h가 아핀이고 샘플이 유한하면 제약을 선형 계획/QP로 풀 수 있다. Adaptive CVaR-BF는 CasADi 구현이 공개돼 있어 travplan의 acados 트랙과도 맞는다. 위험 중립 barrier는 기대값 E[h] ≥ (1−γ)h만 지키므로 실제 샘플의 일부는 h &lt; 0으로 떨어진다. 그것이 그림 (b)다. 영상에서는 적응 CVaR-BF가 군중 속에서 위험 수준 β를 바꿔 가며 보행자 사이를 지나는 것을 본다.</a:t>
             </a:r>
           </a:p>
         </p:txBody>
@@ -1926,7 +1926,7 @@
           <a:lstStyle/>
           <a:p>
             <a:r>
-              <a:t>분산이 작은 쪽을 더 믿는 정밀도 가중 평균이다. 측정 분산이 거리 제곱에 비례하므로 먼 점은 적게 반영된다. 이상치는 Mahalanobis 거리로 버린다. 상한 층이 핵심: 광선이 관측되지 않은 셀 위를 지나가면 그 셀의 지면은 광선 높이보다 낮다. travplan L1(--perception l1)은 이 코드의 코어를 쓰고, TP-0146에서 매퍼 격자가 반 셀 어긋난 래퍼 버그를 고쳤다.</a:t>
+              <a:t>분산이 작은 쪽을 더 믿는 정밀도 가중 평균이다. 측정 분산이 거리 제곱에 비례하므로 먼 점은 적게 반영된다. 이상치는 Mahalanobis 거리로 버린다. 상한 층이 핵심: 광선이 관측되지 않은 셀 위를 지나가면 그 셀의 지면은 광선 높이보다 낮다. travplan L1(--perception l1)은 이 코드의 코어를 쓰고, TP-0146에서 매퍼 격자가 반 셀 어긋난 래퍼 버그를 고쳤다. [3]의 GPU 파이프라인 그림(Fig. 1)은 인식 문서 A.1에 있다. 영상에서는 StarlETH가 걸으며 로봇 중심 높이 지도가 셀마다 갱신되는 것을 본다.</a:t>
             </a:r>
           </a:p>
         </p:txBody>
@@ -2066,7 +2066,7 @@
           <a:lstStyle/>
           <a:p>
             <a:r>
-              <a:t>거리 d에 있는 관측을 k(d)개의 관측으로 세는 우도는 임의의 규칙이 아니다. Vega-Brown 등은 가까우면 비슷하다는 매끄러움 제약 아래 이것이 자연스럽게 나온다는 것을 보였다. 켤레 사전분포를 쓰면 사후가 닫힌 식이라 GPU 격자에서 빠르다. travplan의 fill_unknown과 비교하면, BKI는 채운 값과 함께 얼마나 믿을지를 준다는 점이 다르다.</a:t>
+              <a:t>거리 d에 있는 관측을 k(d)개의 관측으로 세는 우도는 임의의 규칙이 아니다. Vega-Brown 등은 가까우면 비슷하다는 매끄러움 제약 아래 이것이 자연스럽게 나온다는 것을 보였다. 켤레 사전분포를 쓰면 사후가 닫힌 식이라 GPU 격자에서 빠르다. travplan의 fill_unknown과 비교하면, BKI는 채운 값과 함께 얼마나 믿을지를 준다는 점이 다르다. 영상에서는 Cassie Blue의 LiDAR·카메라 관측이 BKI로 합쳐져 시맨틱 지도가 실시간으로 쌓이고, 그 지도에서 보도 칸만 골라 길을 찾는 것을 본다.</a:t>
             </a:r>
           </a:p>
         </p:txBody>
@@ -5446,6 +5446,54 @@
           </a:prstGeom>
         </p:spPr>
       </p:pic>
+      <p:sp>
+        <p:nvSpPr>
+          <p:cNvPr id="3" name="YouTube">
+            <a:hlinkClick r:id="rId3"/>
+          </p:cNvPr>
+          <p:cNvSpPr/>
+          <p:nvPr/>
+        </p:nvSpPr>
+        <p:spPr>
+          <a:xfrm>
+            <a:off x="7696200" y="1675110"/>
+            <a:ext cx="3175000" cy="1784350"/>
+          </a:xfrm>
+          <a:prstGeom prst="rect">
+            <a:avLst/>
+          </a:prstGeom>
+          <a:solidFill>
+            <a:srgbClr val="FFFFFF">
+              <a:alpha val="0"/>
+            </a:srgbClr>
+          </a:solidFill>
+          <a:ln>
+            <a:noFill/>
+          </a:ln>
+          <a:effectLst/>
+        </p:spPr>
+        <p:style>
+          <a:lnRef idx="1">
+            <a:schemeClr val="accent1"/>
+          </a:lnRef>
+          <a:fillRef idx="3">
+            <a:schemeClr val="accent1"/>
+          </a:fillRef>
+          <a:effectRef idx="2">
+            <a:schemeClr val="accent1"/>
+          </a:effectRef>
+          <a:fontRef idx="minor">
+            <a:schemeClr val="lt1"/>
+          </a:fontRef>
+        </p:style>
+        <p:txBody>
+          <a:bodyPr rtlCol="0" anchor="ctr"/>
+          <a:lstStyle/>
+          <a:p>
+            <a:pPr algn="ctr"/>
+          </a:p>
+        </p:txBody>
+      </p:sp>
     </p:spTree>
   </p:cSld>
   <p:clrMapOvr>
@@ -5530,6 +5578,54 @@
           </a:prstGeom>
         </p:spPr>
       </p:pic>
+      <p:sp>
+        <p:nvSpPr>
+          <p:cNvPr id="3" name="YouTube">
+            <a:hlinkClick r:id="rId3"/>
+          </p:cNvPr>
+          <p:cNvSpPr/>
+          <p:nvPr/>
+        </p:nvSpPr>
+        <p:spPr>
+          <a:xfrm>
+            <a:off x="7696200" y="1675110"/>
+            <a:ext cx="3048000" cy="1714500"/>
+          </a:xfrm>
+          <a:prstGeom prst="rect">
+            <a:avLst/>
+          </a:prstGeom>
+          <a:solidFill>
+            <a:srgbClr val="FFFFFF">
+              <a:alpha val="0"/>
+            </a:srgbClr>
+          </a:solidFill>
+          <a:ln>
+            <a:noFill/>
+          </a:ln>
+          <a:effectLst/>
+        </p:spPr>
+        <p:style>
+          <a:lnRef idx="1">
+            <a:schemeClr val="accent1"/>
+          </a:lnRef>
+          <a:fillRef idx="3">
+            <a:schemeClr val="accent1"/>
+          </a:fillRef>
+          <a:effectRef idx="2">
+            <a:schemeClr val="accent1"/>
+          </a:effectRef>
+          <a:fontRef idx="minor">
+            <a:schemeClr val="lt1"/>
+          </a:fontRef>
+        </p:style>
+        <p:txBody>
+          <a:bodyPr rtlCol="0" anchor="ctr"/>
+          <a:lstStyle/>
+          <a:p>
+            <a:pPr algn="ctr"/>
+          </a:p>
+        </p:txBody>
+      </p:sp>
     </p:spTree>
   </p:cSld>
   <p:clrMapOvr>
@@ -5740,6 +5836,54 @@
           </a:prstGeom>
         </p:spPr>
       </p:pic>
+      <p:sp>
+        <p:nvSpPr>
+          <p:cNvPr id="3" name="YouTube">
+            <a:hlinkClick r:id="rId3"/>
+          </p:cNvPr>
+          <p:cNvSpPr/>
+          <p:nvPr/>
+        </p:nvSpPr>
+        <p:spPr>
+          <a:xfrm>
+            <a:off x="8966200" y="1675110"/>
+            <a:ext cx="2413000" cy="1358900"/>
+          </a:xfrm>
+          <a:prstGeom prst="rect">
+            <a:avLst/>
+          </a:prstGeom>
+          <a:solidFill>
+            <a:srgbClr val="FFFFFF">
+              <a:alpha val="0"/>
+            </a:srgbClr>
+          </a:solidFill>
+          <a:ln>
+            <a:noFill/>
+          </a:ln>
+          <a:effectLst/>
+        </p:spPr>
+        <p:style>
+          <a:lnRef idx="1">
+            <a:schemeClr val="accent1"/>
+          </a:lnRef>
+          <a:fillRef idx="3">
+            <a:schemeClr val="accent1"/>
+          </a:fillRef>
+          <a:effectRef idx="2">
+            <a:schemeClr val="accent1"/>
+          </a:effectRef>
+          <a:fontRef idx="minor">
+            <a:schemeClr val="lt1"/>
+          </a:fontRef>
+        </p:style>
+        <p:txBody>
+          <a:bodyPr rtlCol="0" anchor="ctr"/>
+          <a:lstStyle/>
+          <a:p>
+            <a:pPr algn="ctr"/>
+          </a:p>
+        </p:txBody>
+      </p:sp>
     </p:spTree>
   </p:cSld>
   <p:clrMapOvr>
@@ -6076,6 +6220,54 @@
           </a:prstGeom>
         </p:spPr>
       </p:pic>
+      <p:sp>
+        <p:nvSpPr>
+          <p:cNvPr id="3" name="YouTube">
+            <a:hlinkClick r:id="rId3"/>
+          </p:cNvPr>
+          <p:cNvSpPr/>
+          <p:nvPr/>
+        </p:nvSpPr>
+        <p:spPr>
+          <a:xfrm>
+            <a:off x="7823200" y="1700510"/>
+            <a:ext cx="3556000" cy="2000250"/>
+          </a:xfrm>
+          <a:prstGeom prst="rect">
+            <a:avLst/>
+          </a:prstGeom>
+          <a:solidFill>
+            <a:srgbClr val="FFFFFF">
+              <a:alpha val="0"/>
+            </a:srgbClr>
+          </a:solidFill>
+          <a:ln>
+            <a:noFill/>
+          </a:ln>
+          <a:effectLst/>
+        </p:spPr>
+        <p:style>
+          <a:lnRef idx="1">
+            <a:schemeClr val="accent1"/>
+          </a:lnRef>
+          <a:fillRef idx="3">
+            <a:schemeClr val="accent1"/>
+          </a:fillRef>
+          <a:effectRef idx="2">
+            <a:schemeClr val="accent1"/>
+          </a:effectRef>
+          <a:fontRef idx="minor">
+            <a:schemeClr val="lt1"/>
+          </a:fontRef>
+        </p:style>
+        <p:txBody>
+          <a:bodyPr rtlCol="0" anchor="ctr"/>
+          <a:lstStyle/>
+          <a:p>
+            <a:pPr algn="ctr"/>
+          </a:p>
+        </p:txBody>
+      </p:sp>
     </p:spTree>
   </p:cSld>
   <p:clrMapOvr>
@@ -6160,6 +6352,54 @@
           </a:prstGeom>
         </p:spPr>
       </p:pic>
+      <p:sp>
+        <p:nvSpPr>
+          <p:cNvPr id="3" name="YouTube">
+            <a:hlinkClick r:id="rId3"/>
+          </p:cNvPr>
+          <p:cNvSpPr/>
+          <p:nvPr/>
+        </p:nvSpPr>
+        <p:spPr>
+          <a:xfrm>
+            <a:off x="7442200" y="1700510"/>
+            <a:ext cx="3302000" cy="1860550"/>
+          </a:xfrm>
+          <a:prstGeom prst="rect">
+            <a:avLst/>
+          </a:prstGeom>
+          <a:solidFill>
+            <a:srgbClr val="FFFFFF">
+              <a:alpha val="0"/>
+            </a:srgbClr>
+          </a:solidFill>
+          <a:ln>
+            <a:noFill/>
+          </a:ln>
+          <a:effectLst/>
+        </p:spPr>
+        <p:style>
+          <a:lnRef idx="1">
+            <a:schemeClr val="accent1"/>
+          </a:lnRef>
+          <a:fillRef idx="3">
+            <a:schemeClr val="accent1"/>
+          </a:fillRef>
+          <a:effectRef idx="2">
+            <a:schemeClr val="accent1"/>
+          </a:effectRef>
+          <a:fontRef idx="minor">
+            <a:schemeClr val="lt1"/>
+          </a:fontRef>
+        </p:style>
+        <p:txBody>
+          <a:bodyPr rtlCol="0" anchor="ctr"/>
+          <a:lstStyle/>
+          <a:p>
+            <a:pPr algn="ctr"/>
+          </a:p>
+        </p:txBody>
+      </p:sp>
     </p:spTree>
   </p:cSld>
   <p:clrMapOvr>
